--- a/Figure_3_parts/Figure_3.pptx
+++ b/Figure_3_parts/Figure_3.pptx
@@ -208,7 +208,7 @@
           <a:p>
             <a:fld id="{D10F81BB-B84D-4649-9ADF-D04D8311A8B2}" type="datetimeFigureOut">
               <a:rPr lang="en-US" smtClean="0"/>
-              <a:t>10/21/2025</a:t>
+              <a:t>10/22/2025</a:t>
             </a:fld>
             <a:endParaRPr lang="en-US"/>
           </a:p>
@@ -721,7 +721,7 @@
           <a:p>
             <a:fld id="{3338D2F5-C712-F746-9177-6CC1DA9FDF03}" type="datetimeFigureOut">
               <a:rPr lang="en-US" smtClean="0"/>
-              <a:t>10/21/2025</a:t>
+              <a:t>10/22/2025</a:t>
             </a:fld>
             <a:endParaRPr lang="en-US"/>
           </a:p>
@@ -891,7 +891,7 @@
           <a:p>
             <a:fld id="{3338D2F5-C712-F746-9177-6CC1DA9FDF03}" type="datetimeFigureOut">
               <a:rPr lang="en-US" smtClean="0"/>
-              <a:t>10/21/2025</a:t>
+              <a:t>10/22/2025</a:t>
             </a:fld>
             <a:endParaRPr lang="en-US"/>
           </a:p>
@@ -1071,7 +1071,7 @@
           <a:p>
             <a:fld id="{3338D2F5-C712-F746-9177-6CC1DA9FDF03}" type="datetimeFigureOut">
               <a:rPr lang="en-US" smtClean="0"/>
-              <a:t>10/21/2025</a:t>
+              <a:t>10/22/2025</a:t>
             </a:fld>
             <a:endParaRPr lang="en-US"/>
           </a:p>
@@ -1241,7 +1241,7 @@
           <a:p>
             <a:fld id="{3338D2F5-C712-F746-9177-6CC1DA9FDF03}" type="datetimeFigureOut">
               <a:rPr lang="en-US" smtClean="0"/>
-              <a:t>10/21/2025</a:t>
+              <a:t>10/22/2025</a:t>
             </a:fld>
             <a:endParaRPr lang="en-US"/>
           </a:p>
@@ -1487,7 +1487,7 @@
           <a:p>
             <a:fld id="{3338D2F5-C712-F746-9177-6CC1DA9FDF03}" type="datetimeFigureOut">
               <a:rPr lang="en-US" smtClean="0"/>
-              <a:t>10/21/2025</a:t>
+              <a:t>10/22/2025</a:t>
             </a:fld>
             <a:endParaRPr lang="en-US"/>
           </a:p>
@@ -1719,7 +1719,7 @@
           <a:p>
             <a:fld id="{3338D2F5-C712-F746-9177-6CC1DA9FDF03}" type="datetimeFigureOut">
               <a:rPr lang="en-US" smtClean="0"/>
-              <a:t>10/21/2025</a:t>
+              <a:t>10/22/2025</a:t>
             </a:fld>
             <a:endParaRPr lang="en-US"/>
           </a:p>
@@ -2086,7 +2086,7 @@
           <a:p>
             <a:fld id="{3338D2F5-C712-F746-9177-6CC1DA9FDF03}" type="datetimeFigureOut">
               <a:rPr lang="en-US" smtClean="0"/>
-              <a:t>10/21/2025</a:t>
+              <a:t>10/22/2025</a:t>
             </a:fld>
             <a:endParaRPr lang="en-US"/>
           </a:p>
@@ -2204,7 +2204,7 @@
           <a:p>
             <a:fld id="{3338D2F5-C712-F746-9177-6CC1DA9FDF03}" type="datetimeFigureOut">
               <a:rPr lang="en-US" smtClean="0"/>
-              <a:t>10/21/2025</a:t>
+              <a:t>10/22/2025</a:t>
             </a:fld>
             <a:endParaRPr lang="en-US"/>
           </a:p>
@@ -2299,7 +2299,7 @@
           <a:p>
             <a:fld id="{3338D2F5-C712-F746-9177-6CC1DA9FDF03}" type="datetimeFigureOut">
               <a:rPr lang="en-US" smtClean="0"/>
-              <a:t>10/21/2025</a:t>
+              <a:t>10/22/2025</a:t>
             </a:fld>
             <a:endParaRPr lang="en-US"/>
           </a:p>
@@ -2576,7 +2576,7 @@
           <a:p>
             <a:fld id="{3338D2F5-C712-F746-9177-6CC1DA9FDF03}" type="datetimeFigureOut">
               <a:rPr lang="en-US" smtClean="0"/>
-              <a:t>10/21/2025</a:t>
+              <a:t>10/22/2025</a:t>
             </a:fld>
             <a:endParaRPr lang="en-US"/>
           </a:p>
@@ -2833,7 +2833,7 @@
           <a:p>
             <a:fld id="{3338D2F5-C712-F746-9177-6CC1DA9FDF03}" type="datetimeFigureOut">
               <a:rPr lang="en-US" smtClean="0"/>
-              <a:t>10/21/2025</a:t>
+              <a:t>10/22/2025</a:t>
             </a:fld>
             <a:endParaRPr lang="en-US"/>
           </a:p>
@@ -3046,7 +3046,7 @@
           <a:p>
             <a:fld id="{3338D2F5-C712-F746-9177-6CC1DA9FDF03}" type="datetimeFigureOut">
               <a:rPr lang="en-US" smtClean="0"/>
-              <a:t>10/21/2025</a:t>
+              <a:t>10/22/2025</a:t>
             </a:fld>
             <a:endParaRPr lang="en-US"/>
           </a:p>
@@ -3667,7 +3667,7 @@
           <a:p>
             <a:r>
               <a:rPr lang="en-US" sz="1200" b="1" dirty="0"/>
-              <a:t>Y</a:t>
+              <a:t>y</a:t>
             </a:r>
           </a:p>
         </p:txBody>
@@ -3763,7 +3763,7 @@
                             <a:rPr lang="en-US" sz="1600" b="1" i="1" smtClean="0">
                               <a:latin typeface="Cambria Math" panose="02040503050406030204" pitchFamily="18" charset="0"/>
                             </a:rPr>
-                            <m:t>𝒀</m:t>
+                            <m:t>𝒚</m:t>
                           </m:r>
                           <m:r>
                             <a:rPr lang="en-US" sz="1600" b="0" i="1">
@@ -3781,17 +3781,17 @@
                             <m:accPr>
                               <m:chr m:val="̂"/>
                               <m:ctrlPr>
-                                <a:rPr lang="en-US" sz="1600" b="0" i="1" smtClean="0">
+                                <a:rPr lang="en-US" sz="1600" b="1" i="1" smtClean="0">
                                   <a:latin typeface="Cambria Math" panose="02040503050406030204" pitchFamily="18" charset="0"/>
                                 </a:rPr>
                               </m:ctrlPr>
                             </m:accPr>
                             <m:e>
                               <m:r>
-                                <a:rPr lang="en-US" sz="1600" b="0" i="1" smtClean="0">
+                                <a:rPr lang="en-US" sz="1600" b="1" i="1" smtClean="0">
                                   <a:latin typeface="Cambria Math" panose="02040503050406030204" pitchFamily="18" charset="0"/>
                                 </a:rPr>
-                                <m:t>𝑓</m:t>
+                                <m:t>𝒇</m:t>
                               </m:r>
                             </m:e>
                           </m:acc>
@@ -9121,45 +9121,6 @@
         </p:cxnSp>
         <p:cxnSp>
           <p:nvCxnSpPr>
-            <p:cNvPr id="176" name="Straight Connector 175">
-              <a:extLst>
-                <a:ext uri="{FF2B5EF4-FFF2-40B4-BE49-F238E27FC236}">
-                  <a16:creationId xmlns:a16="http://schemas.microsoft.com/office/drawing/2014/main" id="{0E29436A-DED5-778E-B982-DE4BA5F450C7}"/>
-                </a:ext>
-              </a:extLst>
-            </p:cNvPr>
-            <p:cNvCxnSpPr>
-              <a:cxnSpLocks/>
-            </p:cNvCxnSpPr>
-            <p:nvPr/>
-          </p:nvCxnSpPr>
-          <p:spPr>
-            <a:xfrm>
-              <a:off x="0" y="3169781"/>
-              <a:ext cx="2697480" cy="0"/>
-            </a:xfrm>
-            <a:prstGeom prst="line">
-              <a:avLst/>
-            </a:prstGeom>
-            <a:ln w="38100"/>
-          </p:spPr>
-          <p:style>
-            <a:lnRef idx="2">
-              <a:schemeClr val="accent1"/>
-            </a:lnRef>
-            <a:fillRef idx="0">
-              <a:schemeClr val="accent1"/>
-            </a:fillRef>
-            <a:effectRef idx="1">
-              <a:schemeClr val="accent1"/>
-            </a:effectRef>
-            <a:fontRef idx="minor">
-              <a:schemeClr val="tx1"/>
-            </a:fontRef>
-          </p:style>
-        </p:cxnSp>
-        <p:cxnSp>
-          <p:nvCxnSpPr>
             <p:cNvPr id="177" name="Straight Connector 176">
               <a:extLst>
                 <a:ext uri="{FF2B5EF4-FFF2-40B4-BE49-F238E27FC236}">
@@ -9285,6 +9246,45 @@
             </a:p>
           </p:txBody>
         </p:sp>
+        <p:cxnSp>
+          <p:nvCxnSpPr>
+            <p:cNvPr id="176" name="Straight Connector 175">
+              <a:extLst>
+                <a:ext uri="{FF2B5EF4-FFF2-40B4-BE49-F238E27FC236}">
+                  <a16:creationId xmlns:a16="http://schemas.microsoft.com/office/drawing/2014/main" id="{0E29436A-DED5-778E-B982-DE4BA5F450C7}"/>
+                </a:ext>
+              </a:extLst>
+            </p:cNvPr>
+            <p:cNvCxnSpPr>
+              <a:cxnSpLocks/>
+            </p:cNvCxnSpPr>
+            <p:nvPr/>
+          </p:nvCxnSpPr>
+          <p:spPr>
+            <a:xfrm>
+              <a:off x="0" y="3169781"/>
+              <a:ext cx="2697480" cy="0"/>
+            </a:xfrm>
+            <a:prstGeom prst="line">
+              <a:avLst/>
+            </a:prstGeom>
+            <a:ln w="38100"/>
+          </p:spPr>
+          <p:style>
+            <a:lnRef idx="2">
+              <a:schemeClr val="accent1"/>
+            </a:lnRef>
+            <a:fillRef idx="0">
+              <a:schemeClr val="accent1"/>
+            </a:fillRef>
+            <a:effectRef idx="1">
+              <a:schemeClr val="accent1"/>
+            </a:effectRef>
+            <a:fontRef idx="minor">
+              <a:schemeClr val="tx1"/>
+            </a:fontRef>
+          </p:style>
+        </p:cxnSp>
       </p:grpSp>
       <p:sp>
         <p:nvSpPr>
